--- a/web/e2e/fixtures/sample.pptx
+++ b/web/e2e/fixtures/sample.pptx
@@ -95,33 +95,32 @@
       </p:sp>
       <p:sp>
         <p:spPr>
-          <a:xfrm>
+          <a:xfrm rot="2700000">
             <a:off x="838200" y="1800000"/>
-            <a:ext cx="7772400" cy="2000000"/>
+            <a:ext cx="2200000" cy="1200000"/>
           </a:xfrm>
-        </p:spPr>
-        <p:txBody>
-          <a:p>
-            <a:r>
-              <a:rPr sz="2000"/>
-              <a:t>居中标题 + 椭圆形状,演示模式可翻页</a:t>
-            </a:r>
-          </a:p>
-        </p:txBody>
-      </p:sp>
-      <p:sp>
-        <p:spPr>
-          <a:xfrm>
-            <a:off x="5000000" y="2500000"/>
-            <a:ext cx="2500000" cy="1500000"/>
-          </a:xfrm>
-          <a:prstGeom prst="ellipse"/>
+          <a:prstGeom prst="rect"/>
           <a:solidFill>
             <a:srgbClr val="4472C4"/>
           </a:solidFill>
         </p:spPr>
       </p:sp>
+      <p:graphicFrame>
+        <p:xfrm>
+          <a:off x="4200000" y="1800000"/>
+          <a:ext cx="3500000" cy="2600000"/>
+        </p:xfrm>
+        <a:graphic>
+          <a:graphicData uri="http://schemas.openxmlformats.org/drawingml/2006/chart"/>
+        </a:graphic>
+      </p:graphicFrame>
     </p:spTree>
   </p:cSld>
+  <p:transition>
+    <p:fade/>
+  </p:transition>
+  <p:timing>
+    <p:tnLst/>
+  </p:timing>
 </p:sld>
 </file>
--- a/web/e2e/fixtures/sample.pptx
+++ b/web/e2e/fixtures/sample.pptx
@@ -72,6 +72,9 @@
   <p:cSld>
     <p:spTree>
       <p:sp>
+        <p:nvSpPr>
+          <p:cNvPr id="2" name="Title"/>
+        </p:nvSpPr>
         <p:spPr>
           <a:xfrm>
             <a:off x="838200" y="365760"/>
@@ -94,6 +97,9 @@
         </p:txBody>
       </p:sp>
       <p:sp>
+        <p:nvSpPr>
+          <p:cNvPr id="3" name="Rot"/>
+        </p:nvSpPr>
         <p:spPr>
           <a:xfrm rot="2700000">
             <a:off x="838200" y="1800000"/>
@@ -106,6 +112,9 @@
         </p:spPr>
       </p:sp>
       <p:graphicFrame>
+        <p:nvGraphicFramePr>
+          <p:cNvPr id="4" name="Chart"/>
+        </p:nvGraphicFramePr>
         <p:xfrm>
           <a:off x="4200000" y="1800000"/>
           <a:ext cx="3500000" cy="2600000"/>
@@ -120,7 +129,46 @@
     <p:fade/>
   </p:transition>
   <p:timing>
-    <p:tnLst/>
+    <p:tnLst>
+      <p:par>
+        <p:cTn id="1" dur="indefinite" nodeType="tmRoot">
+          <p:childTnLst>
+            <p:seq concurrent="1">
+              <p:cTn id="2" dur="indefinite" nodeType="mainSeq">
+                <p:childTnLst>
+                  <p:par>
+                    <p:cTn id="3" fill="hold" nodeType="clickEffect">
+                      <p:childTnLst>
+                        <p:set>
+                          <p:cBhvr>
+                            <p:tgtEl>
+                              <p:spTgt spid="3"/>
+                            </p:tgtEl>
+                          </p:cBhvr>
+                        </p:set>
+                      </p:childTnLst>
+                    </p:cTn>
+                  </p:par>
+                  <p:par>
+                    <p:cTn id="4" fill="hold" nodeType="clickEffect">
+                      <p:childTnLst>
+                        <p:set>
+                          <p:cBhvr>
+                            <p:tgtEl>
+                              <p:spTgt spid="4"/>
+                            </p:tgtEl>
+                          </p:cBhvr>
+                        </p:set>
+                      </p:childTnLst>
+                    </p:cTn>
+                  </p:par>
+                </p:childTnLst>
+              </p:cTn>
+            </p:seq>
+          </p:childTnLst>
+        </p:cTn>
+      </p:par>
+    </p:tnLst>
   </p:timing>
 </p:sld>
 </file>